--- a/연구1_하계_EfficientNetV2-S/발표자료/하계학술대회 PPT.pptx
+++ b/연구1_하계_EfficientNetV2-S/발표자료/하계학술대회 PPT.pptx
@@ -301,7 +301,7 @@
           <a:p>
             <a:r>
               <a:rPr lang="en-US" dirty="0"/>
-              <a:t>안녕하십니까. 경기대학교 컴퓨터과학과 곽윤석입니다. 오늘은 'EfficientNetV2-S 모델 기반 의료 영상 비식별화 성능 분석'이라는 주제로 발표하겠습니다. 폐 CT 영상에 Gaussian Blur와 Block Encryption을 적용했을 때, EfficientNetV2-S 모델의 폐암 분류 성능이 어떻게 달라지는지를 비교한 연구입니다.</a:t>
+              <a:t>안녕하십니까. 경기대학교  곽윤석입니다. 오늘은 'EfficientNetV2-S 모델 기반 의료 영상 비식별화 성능 분석'이라는 주제로 발표하겠습니다. 폐 CT 영상에 Gaussian Blur와 Block Encryption을 적용했을 때, EfficientNetV2-S 모델의 폐암 분류 성능이 어떻게 달라지는지를 비교한 연구입니다.</a:t>
             </a:r>
           </a:p>
         </p:txBody>
@@ -2566,7 +2566,7 @@
                 <a:ea typeface="Calibri" pitchFamily="34" charset="-122"/>
                 <a:cs typeface="Calibri" pitchFamily="34" charset="-120"/>
               </a:rPr>
-              <a:t>경기대학교 컴퓨터과학과</a:t>
+              <a:t>경기대학교 </a:t>
             </a:r>
             <a:endParaRPr lang="en-US" sz="1300" dirty="0"/>
           </a:p>
